--- a/public/fun/pack/pptx/reviewpro/보장점검양식프리미엄_37_부부점검_시나몬로즈.pptx
+++ b/public/fun/pack/pptx/reviewpro/보장점검양식프리미엄_37_부부점검_시나몬로즈.pptx
@@ -112,12 +112,12 @@
   <p:extLst>
     <p:ext uri="{521415D9-36F7-43E2-AB2F-B90AF26B5E84}">
       <p14:sectionLst xmlns:p14="http://schemas.microsoft.com/office/powerpoint/2010/main">
-        <p14:section name="시작" id="{9AF4AC84-DBA9-4147-9622-947FE859364F}">
+        <p14:section name="시작" id="{8C6AE77D-F8AA-4F26-BC9C-0CA8EB6F4F00}">
           <p14:sldIdLst>
             <p14:sldId id="256"/>
           </p14:sldIdLst>
         </p14:section>
-        <p14:section name="본문" id="{D27CEA23-9DC7-4C00-AB16-8197297E456D}">
+        <p14:section name="본문" id="{C108998D-1E35-4412-9E1F-6531440E297E}">
           <p14:sldIdLst>
             <p14:sldId id="257"/>
             <p14:sldId id="258"/>
@@ -1486,7 +1486,7 @@
             </a:lvl1pPr>
           </a:lstStyle>
           <a:p>
-            <a:fld id="{18844163-DDC9-44D7-9866-83B61C325C4F}" type="slidenum">
+            <a:fld id="{1403D39E-4EAC-4546-B9F2-F7FBF761D17E}" type="slidenum">
               <a:rPr lang="en-US"/>
               <a:t>‹#›</a:t>
             </a:fld>
@@ -2136,7 +2136,7 @@
             </a:lvl1pPr>
           </a:lstStyle>
           <a:p>
-            <a:fld id="{34E6AC71-7E63-441B-8CBD-7F3910D2A83D}" type="slidenum">
+            <a:fld id="{4E95F543-56FF-4C1C-B2D4-22AE34128604}" type="slidenum">
               <a:rPr lang="en-US"/>
               <a:t>‹#›</a:t>
             </a:fld>
@@ -2824,7 +2824,7 @@
             </a:lvl1pPr>
           </a:lstStyle>
           <a:p>
-            <a:fld id="{33E59583-211A-4BD1-A5E4-A8CF69C2D9C3}" type="slidenum">
+            <a:fld id="{F7D32D9D-154B-413A-8449-8AAC2414B126}" type="slidenum">
               <a:rPr lang="en-US"/>
               <a:t>‹#›</a:t>
             </a:fld>
@@ -3713,7 +3713,7 @@
           <a:p>
             <a:r>
               <a:rPr lang="ko-KR"/>
-              <a:t>가을 저녁, 둘이 마주 앉아 점검합니다</a:t>
+              <a:t>저녁에 둘이 마주 앉아 점검합니다</a:t>
             </a:r>
           </a:p>
         </p:txBody>
@@ -3735,7 +3735,7 @@
           <a:p>
             <a:r>
               <a:rPr lang="ko-KR"/>
-              <a:t>부부 점검 · 0000. 00. 00</a:t>
+              <a:t>부부 점검 · 날짜 입력</a:t>
             </a:r>
           </a:p>
           <a:p>
@@ -3826,7 +3826,7 @@
           <a:bodyPr/>
           <a:lstStyle/>
           <a:p>
-            <a:fld id="{FC1D0B7F-2BC6-4F3D-AEDE-4C2EE64CB795}" type="slidenum">
+            <a:fld id="{A0B8DD19-1025-46F0-BDD9-62A15F318670}" type="slidenum">
               <a:rPr lang="en-US"/>
               <a:t>‹#›</a:t>
             </a:fld>
@@ -4539,7 +4539,7 @@
           <a:bodyPr/>
           <a:lstStyle/>
           <a:p>
-            <a:fld id="{AABBA8BA-F017-4188-837F-EE2F798F4A05}" type="slidenum">
+            <a:fld id="{2108D3D9-188C-48BD-B302-95A08CD2A7BB}" type="slidenum">
               <a:rPr lang="en-US"/>
               <a:t>‹#›</a:t>
             </a:fld>
@@ -6045,7 +6045,7 @@
           <a:bodyPr/>
           <a:lstStyle/>
           <a:p>
-            <a:fld id="{C62663B9-5410-4E08-9A20-D5D456AA336D}" type="slidenum">
+            <a:fld id="{62B163A4-AA1D-444F-A31F-1062FEABFB57}" type="slidenum">
               <a:rPr lang="en-US"/>
               <a:t>‹#›</a:t>
             </a:fld>
@@ -7595,7 +7595,7 @@
           <a:bodyPr/>
           <a:lstStyle/>
           <a:p>
-            <a:fld id="{AEAC0618-2BB8-4432-8C10-A1FF4BD1E303}" type="slidenum">
+            <a:fld id="{7E5A7787-1A82-4CD2-A8FB-5291BDD99C7A}" type="slidenum">
               <a:rPr lang="en-US"/>
               <a:t>‹#›</a:t>
             </a:fld>
@@ -8466,7 +8466,7 @@
           <a:bodyPr/>
           <a:lstStyle/>
           <a:p>
-            <a:fld id="{002E2490-DB90-4D9B-BE26-3DEFF91BEA6E}" type="slidenum">
+            <a:fld id="{F73E5422-F074-475D-8650-0D7A60A8AFAB}" type="slidenum">
               <a:rPr lang="en-US"/>
               <a:t>‹#›</a:t>
             </a:fld>
